--- a/level3/slides/Level3_Lesson11_Slides.pptx
+++ b/level3/slides/Level3_Lesson11_Slides.pptx
@@ -1486,7 +1486,7 @@
           </a:p>
           <a:p>
             <a:r>
-              <a:t>The audio (about 1:15) is coming soon. When it is ready, it plays the conversation once; press play again for play 2. Until then, read the listening script (at the end of these notes) with a volunteer.</a:t>
+              <a:t>The audio (L3_L11_listening.mp3, about 1:17) plays the conversation once. Press play again for play 2. A third play is fine if the class needs it.</a:t>
             </a:r>
           </a:p>
           <a:p>
@@ -1496,7 +1496,7 @@
           </a:p>
           <a:p>
             <a:r>
-              <a:t>Audio: the listening audio for this lesson (about 1:15) is coming soon. It will use computer-generated voices (Chatterbox TTS cloned from synthetic Kokoro-82M reference clips); no recordings of real people. Until it is ready, read the listening script (in the notes of the Before You Listen slide) with a volunteer. The names and the story are invented.</a:t>
+              <a:t>Audio: synthetic voices, computer-generated (Chatterbox TTS cloned from Kokoro-82M reference clips). No recordings of real people. The names and the story are invented.</a:t>
             </a:r>
           </a:p>
           <a:p>
@@ -1507,86 +1507,6 @@
           <a:p>
             <a:r>
               <a:t>Picture: Twemoji graphics by Twitter, Inc. and other contributors (https://github.com/jdecked/twemoji), CC BY 4.0 (https://creativecommons.org/licenses/by/4.0/); resized and combined, with speech bubbles, signs, and labels (images/CREDITS.md).</a:t>
-            </a:r>
-          </a:p>
-          <a:p>
-            <a:r>
-              <a:t>Listening script (the audio is coming soon; until then, read it aloud with a volunteer at a normal, friendly speed):</a:t>
-            </a:r>
-          </a:p>
-          <a:p>
-            <a:r>
-              <a:t>Narrator: Lesson eleven. Listening. It's Monday morning. Elena and Luis are coworkers. They're talking about the weekend. Listen.</a:t>
-            </a:r>
-          </a:p>
-          <a:p>
-            <a:r>
-              <a:t>Luis: Hi, Elena. How was your weekend? Did you do anything fun?</a:t>
-            </a:r>
-          </a:p>
-          <a:p>
-            <a:r>
-              <a:t>Elena: It was great! I went to the food festival at Riverside Park with my sister.</a:t>
-            </a:r>
-          </a:p>
-          <a:p>
-            <a:r>
-              <a:t>Luis: Really? How was it?</a:t>
-            </a:r>
-          </a:p>
-          <a:p>
-            <a:r>
-              <a:t>Elena: It was so exciting. There was live music, and we tried food from ten countries.</a:t>
-            </a:r>
-          </a:p>
-          <a:p>
-            <a:r>
-              <a:t>Luis: Was it crowded?</a:t>
-            </a:r>
-          </a:p>
-          <a:p>
-            <a:r>
-              <a:t>Elena: Yes, very. The lines were long, so I was a little tired at the end. How about you?</a:t>
-            </a:r>
-          </a:p>
-          <a:p>
-            <a:r>
-              <a:t>Luis: I went to a photo workshop at the city museum on Sunday. I was really interested in it.</a:t>
-            </a:r>
-          </a:p>
-          <a:p>
-            <a:r>
-              <a:t>Elena: Oh, nice! Was it interesting?</a:t>
-            </a:r>
-          </a:p>
-          <a:p>
-            <a:r>
-              <a:t>Luis: Not really. I thought it was confusing. The teacher talked very fast.</a:t>
-            </a:r>
-          </a:p>
-          <a:p>
-            <a:r>
-              <a:t>Elena: Oh no. Were you bored?</a:t>
-            </a:r>
-          </a:p>
-          <a:p>
-            <a:r>
-              <a:t>Luis: Yes, I was bored, so I left early. But the museum coffee shop was really relaxing.</a:t>
-            </a:r>
-          </a:p>
-          <a:p>
-            <a:r>
-              <a:t>Elena: Next time, come to the festival with me. You'll love it!</a:t>
-            </a:r>
-          </a:p>
-          <a:p>
-            <a:r>
-              <a:t>Luis: OK. That sounds fun. Maybe next month.</a:t>
-            </a:r>
-          </a:p>
-          <a:p>
-            <a:r>
-              <a:t>Narrator: That's the end of the listening.</a:t>
             </a:r>
           </a:p>
         </p:txBody>
@@ -2596,7 +2516,7 @@
           </a:p>
           <a:p>
             <a:r>
-              <a:t>Audio: the listening audio for this lesson (about 1:15) is coming soon. It will use computer-generated voices (Chatterbox TTS cloned from synthetic Kokoro-82M reference clips); no recordings of real people. Until it is ready, read the listening script (in the notes of the Before You Listen slide) with a volunteer. The names and the story are invented.</a:t>
+              <a:t>Audio: synthetic voices, computer-generated (Chatterbox TTS cloned from Kokoro-82M reference clips). No recordings of real people. The names and the story are invented.</a:t>
             </a:r>
           </a:p>
           <a:p>
@@ -12067,7 +11987,7 @@
                 <a:ea typeface="Lexend Deca" pitchFamily="34" charset="-122"/>
                 <a:cs typeface="Lexend Deca" pitchFamily="34" charset="-120"/>
               </a:rPr>
-              <a:t>Audio: about 1:15. It plays once.</a:t>
+              <a:t>Audio: about 1:17. It plays once.</a:t>
             </a:r>
             <a:endParaRPr lang="en-US" sz="2200" dirty="0"/>
           </a:p>
@@ -31237,7 +31157,7 @@
                 <a:ea typeface="Lexend Deca" pitchFamily="34" charset="-122"/>
                 <a:cs typeface="Lexend Deca" pitchFamily="34" charset="-120"/>
               </a:rPr>
-              <a:t>Audio (coming soon): synthetic voices made with Chatterbox TTS (MIT License), cloned from short synthetic reference clips made with Kokoro-82M (Apache License 2.0). No recordings of real people. Each file will carry an inaudible Perth watermark marking it as AI-generated. Font: Lexend Deca (OFL 1.1).</a:t>
+              <a:t>Audio: synthetic voices made with Chatterbox TTS (MIT License), cloned from short synthetic reference clips made with Kokoro-82M (Apache License 2.0). No recordings of real people were used. Each file carries an inaudible Perth watermark marking it as AI-generated. Font: Lexend Deca (OFL 1.1).</a:t>
             </a:r>
             <a:endParaRPr lang="en-US" sz="1350" dirty="0" b="0"/>
           </a:p>
